--- a/AI_for_Operations_Course/Slides/Class_02_Operational_Data_Engineering.pptx
+++ b/AI_for_Operations_Course/Slides/Class_02_Operational_Data_Engineering.pptx
@@ -1933,6 +1933,10 @@
           </a:solidFill>
           <a:ln/>
         </p:spPr>
+        <p:txBody>
+          <a:bodyPr/>
+          <a:p/>
+        </p:txBody>
       </p:sp>
       <p:sp>
         <p:nvSpPr>
@@ -1992,6 +1996,10 @@
           </a:solidFill>
           <a:ln/>
         </p:spPr>
+        <p:txBody>
+          <a:bodyPr/>
+          <a:p/>
+        </p:txBody>
       </p:sp>
       <p:sp>
         <p:nvSpPr>
@@ -2051,6 +2059,10 @@
           </a:solidFill>
           <a:ln/>
         </p:spPr>
+        <p:txBody>
+          <a:bodyPr/>
+          <a:p/>
+        </p:txBody>
       </p:sp>
       <p:sp>
         <p:nvSpPr>
@@ -2110,6 +2122,10 @@
           </a:solidFill>
           <a:ln/>
         </p:spPr>
+        <p:txBody>
+          <a:bodyPr/>
+          <a:p/>
+        </p:txBody>
       </p:sp>
       <p:sp>
         <p:nvSpPr>
@@ -2169,6 +2185,10 @@
           </a:solidFill>
           <a:ln/>
         </p:spPr>
+        <p:txBody>
+          <a:bodyPr/>
+          <a:p/>
+        </p:txBody>
       </p:sp>
       <p:sp>
         <p:nvSpPr>
@@ -2228,6 +2248,10 @@
           </a:solidFill>
           <a:ln/>
         </p:spPr>
+        <p:txBody>
+          <a:bodyPr/>
+          <a:p/>
+        </p:txBody>
       </p:sp>
       <p:sp>
         <p:nvSpPr>
@@ -2287,6 +2311,10 @@
           </a:solidFill>
           <a:ln/>
         </p:spPr>
+        <p:txBody>
+          <a:bodyPr/>
+          <a:p/>
+        </p:txBody>
       </p:sp>
       <p:sp>
         <p:nvSpPr>
@@ -2470,7 +2498,7 @@
                 <a:ea typeface="Calibri" pitchFamily="34" charset="-122"/>
                 <a:cs typeface="Calibri" pitchFamily="34" charset="-120"/>
               </a:rPr>
-              <a:t>Proxiant Academy — www.proxiant.com</a:t>
+              <a:t>Proxiant Academy | proxiant.ai</a:t>
             </a:r>
             <a:endParaRPr lang="en-US" sz="1600" dirty="0"/>
           </a:p>
@@ -2566,6 +2594,10 @@
           </a:solidFill>
           <a:ln/>
         </p:spPr>
+        <p:txBody>
+          <a:bodyPr/>
+          <a:p/>
+        </p:txBody>
       </p:sp>
       <p:sp>
         <p:nvSpPr>
@@ -2976,6 +3008,10 @@
           </a:solidFill>
           <a:ln/>
         </p:spPr>
+        <p:txBody>
+          <a:bodyPr/>
+          <a:p/>
+        </p:txBody>
       </p:sp>
       <p:sp>
         <p:nvSpPr>
@@ -3035,6 +3071,10 @@
           </a:solidFill>
           <a:ln/>
         </p:spPr>
+        <p:txBody>
+          <a:bodyPr/>
+          <a:p/>
+        </p:txBody>
       </p:sp>
       <p:sp>
         <p:nvSpPr>
@@ -3094,6 +3134,10 @@
           </a:solidFill>
           <a:ln/>
         </p:spPr>
+        <p:txBody>
+          <a:bodyPr/>
+          <a:p/>
+        </p:txBody>
       </p:sp>
       <p:sp>
         <p:nvSpPr>
@@ -3153,6 +3197,10 @@
           </a:solidFill>
           <a:ln/>
         </p:spPr>
+        <p:txBody>
+          <a:bodyPr/>
+          <a:p/>
+        </p:txBody>
       </p:sp>
       <p:sp>
         <p:nvSpPr>
@@ -3212,6 +3260,10 @@
           </a:solidFill>
           <a:ln/>
         </p:spPr>
+        <p:txBody>
+          <a:bodyPr/>
+          <a:p/>
+        </p:txBody>
       </p:sp>
       <p:sp>
         <p:nvSpPr>
@@ -3271,6 +3323,10 @@
           </a:solidFill>
           <a:ln/>
         </p:spPr>
+        <p:txBody>
+          <a:bodyPr/>
+          <a:p/>
+        </p:txBody>
       </p:sp>
       <p:sp>
         <p:nvSpPr>
@@ -3447,6 +3503,10 @@
           </a:solidFill>
           <a:ln/>
         </p:spPr>
+        <p:txBody>
+          <a:bodyPr/>
+          <a:p/>
+        </p:txBody>
       </p:sp>
       <p:sp>
         <p:nvSpPr>
@@ -3623,6 +3683,10 @@
           </a:solidFill>
           <a:ln/>
         </p:spPr>
+        <p:txBody>
+          <a:bodyPr/>
+          <a:p/>
+        </p:txBody>
       </p:sp>
       <p:sp>
         <p:nvSpPr>
@@ -3799,6 +3863,10 @@
           </a:solidFill>
           <a:ln/>
         </p:spPr>
+        <p:txBody>
+          <a:bodyPr/>
+          <a:p/>
+        </p:txBody>
       </p:sp>
       <p:sp>
         <p:nvSpPr>
@@ -4046,6 +4114,10 @@
           </a:solidFill>
           <a:ln/>
         </p:spPr>
+        <p:txBody>
+          <a:bodyPr/>
+          <a:p/>
+        </p:txBody>
       </p:sp>
       <p:sp>
         <p:nvSpPr>
@@ -4110,6 +4182,10 @@
             <a:prstDash val="solid"/>
           </a:ln>
         </p:spPr>
+        <p:txBody>
+          <a:bodyPr/>
+          <a:p/>
+        </p:txBody>
       </p:sp>
       <p:sp>
         <p:nvSpPr>
@@ -4173,6 +4249,10 @@
             <a:tailEnd type="triangle"/>
           </a:ln>
         </p:spPr>
+        <p:txBody>
+          <a:bodyPr/>
+          <a:p/>
+        </p:txBody>
       </p:sp>
       <p:sp>
         <p:nvSpPr>
@@ -4198,6 +4278,10 @@
             <a:prstDash val="solid"/>
           </a:ln>
         </p:spPr>
+        <p:txBody>
+          <a:bodyPr/>
+          <a:p/>
+        </p:txBody>
       </p:sp>
       <p:sp>
         <p:nvSpPr>
@@ -4261,6 +4345,10 @@
             <a:tailEnd type="triangle"/>
           </a:ln>
         </p:spPr>
+        <p:txBody>
+          <a:bodyPr/>
+          <a:p/>
+        </p:txBody>
       </p:sp>
       <p:sp>
         <p:nvSpPr>
@@ -4286,6 +4374,10 @@
             <a:prstDash val="solid"/>
           </a:ln>
         </p:spPr>
+        <p:txBody>
+          <a:bodyPr/>
+          <a:p/>
+        </p:txBody>
       </p:sp>
       <p:sp>
         <p:nvSpPr>
@@ -4349,6 +4441,10 @@
             <a:tailEnd type="triangle"/>
           </a:ln>
         </p:spPr>
+        <p:txBody>
+          <a:bodyPr/>
+          <a:p/>
+        </p:txBody>
       </p:sp>
       <p:sp>
         <p:nvSpPr>
@@ -4374,6 +4470,10 @@
             <a:prstDash val="solid"/>
           </a:ln>
         </p:spPr>
+        <p:txBody>
+          <a:bodyPr/>
+          <a:p/>
+        </p:txBody>
       </p:sp>
       <p:sp>
         <p:nvSpPr>
@@ -4437,6 +4537,10 @@
             <a:tailEnd type="triangle"/>
           </a:ln>
         </p:spPr>
+        <p:txBody>
+          <a:bodyPr/>
+          <a:p/>
+        </p:txBody>
       </p:sp>
       <p:sp>
         <p:nvSpPr>
@@ -4462,6 +4566,10 @@
             <a:prstDash val="solid"/>
           </a:ln>
         </p:spPr>
+        <p:txBody>
+          <a:bodyPr/>
+          <a:p/>
+        </p:txBody>
       </p:sp>
       <p:sp>
         <p:nvSpPr>
@@ -4709,6 +4817,10 @@
           </a:solidFill>
           <a:ln/>
         </p:spPr>
+        <p:txBody>
+          <a:bodyPr/>
+          <a:p/>
+        </p:txBody>
       </p:sp>
       <p:sp>
         <p:nvSpPr>
@@ -4768,6 +4880,10 @@
           </a:solidFill>
           <a:ln/>
         </p:spPr>
+        <p:txBody>
+          <a:bodyPr/>
+          <a:p/>
+        </p:txBody>
       </p:sp>
       <p:sp>
         <p:nvSpPr>
@@ -5183,6 +5299,10 @@
           </a:solidFill>
           <a:ln/>
         </p:spPr>
+        <p:txBody>
+          <a:bodyPr/>
+          <a:p/>
+        </p:txBody>
       </p:sp>
       <p:sp>
         <p:nvSpPr>
@@ -5598,6 +5718,10 @@
           </a:solidFill>
           <a:ln/>
         </p:spPr>
+        <p:txBody>
+          <a:bodyPr/>
+          <a:p/>
+        </p:txBody>
       </p:sp>
       <p:sp>
         <p:nvSpPr>
@@ -6084,6 +6208,10 @@
           </a:solidFill>
           <a:ln/>
         </p:spPr>
+        <p:txBody>
+          <a:bodyPr/>
+          <a:p/>
+        </p:txBody>
       </p:sp>
       <p:sp>
         <p:nvSpPr>
@@ -6143,6 +6271,10 @@
           </a:solidFill>
           <a:ln/>
         </p:spPr>
+        <p:txBody>
+          <a:bodyPr/>
+          <a:p/>
+        </p:txBody>
       </p:sp>
       <p:sp>
         <p:nvSpPr>
@@ -6202,6 +6334,10 @@
           </a:solidFill>
           <a:ln/>
         </p:spPr>
+        <p:txBody>
+          <a:bodyPr/>
+          <a:p/>
+        </p:txBody>
       </p:sp>
       <p:sp>
         <p:nvSpPr>
@@ -6261,6 +6397,10 @@
           </a:solidFill>
           <a:ln/>
         </p:spPr>
+        <p:txBody>
+          <a:bodyPr/>
+          <a:p/>
+        </p:txBody>
       </p:sp>
       <p:sp>
         <p:nvSpPr>
@@ -6320,6 +6460,10 @@
           </a:solidFill>
           <a:ln/>
         </p:spPr>
+        <p:txBody>
+          <a:bodyPr/>
+          <a:p/>
+        </p:txBody>
       </p:sp>
       <p:sp>
         <p:nvSpPr>
@@ -6457,6 +6601,10 @@
           </a:solidFill>
           <a:ln/>
         </p:spPr>
+        <p:txBody>
+          <a:bodyPr/>
+          <a:p/>
+        </p:txBody>
       </p:sp>
       <p:sp>
         <p:nvSpPr>
@@ -6594,6 +6742,10 @@
           </a:solidFill>
           <a:ln/>
         </p:spPr>
+        <p:txBody>
+          <a:bodyPr/>
+          <a:p/>
+        </p:txBody>
       </p:sp>
       <p:sp>
         <p:nvSpPr>
@@ -6731,6 +6883,10 @@
           </a:solidFill>
           <a:ln/>
         </p:spPr>
+        <p:txBody>
+          <a:bodyPr/>
+          <a:p/>
+        </p:txBody>
       </p:sp>
       <p:sp>
         <p:nvSpPr>
@@ -6868,6 +7024,10 @@
           </a:solidFill>
           <a:ln/>
         </p:spPr>
+        <p:txBody>
+          <a:bodyPr/>
+          <a:p/>
+        </p:txBody>
       </p:sp>
       <p:sp>
         <p:nvSpPr>
@@ -7005,6 +7165,10 @@
           </a:solidFill>
           <a:ln/>
         </p:spPr>
+        <p:txBody>
+          <a:bodyPr/>
+          <a:p/>
+        </p:txBody>
       </p:sp>
       <p:sp>
         <p:nvSpPr>
@@ -7213,6 +7377,10 @@
           </a:solidFill>
           <a:ln/>
         </p:spPr>
+        <p:txBody>
+          <a:bodyPr/>
+          <a:p/>
+        </p:txBody>
       </p:sp>
       <p:sp>
         <p:nvSpPr>
@@ -7355,6 +7523,10 @@
             <a:prstDash val="solid"/>
           </a:ln>
         </p:spPr>
+        <p:txBody>
+          <a:bodyPr/>
+          <a:p/>
+        </p:txBody>
       </p:sp>
       <p:sp>
         <p:nvSpPr>
@@ -7497,6 +7669,10 @@
             <a:prstDash val="solid"/>
           </a:ln>
         </p:spPr>
+        <p:txBody>
+          <a:bodyPr/>
+          <a:p/>
+        </p:txBody>
       </p:sp>
       <p:sp>
         <p:nvSpPr>
@@ -7639,6 +7815,10 @@
             <a:prstDash val="solid"/>
           </a:ln>
         </p:spPr>
+        <p:txBody>
+          <a:bodyPr/>
+          <a:p/>
+        </p:txBody>
       </p:sp>
       <p:sp>
         <p:nvSpPr>
@@ -7781,6 +7961,10 @@
             <a:prstDash val="solid"/>
           </a:ln>
         </p:spPr>
+        <p:txBody>
+          <a:bodyPr/>
+          <a:p/>
+        </p:txBody>
       </p:sp>
       <p:sp>
         <p:nvSpPr>
@@ -7911,6 +8095,10 @@
           </a:solidFill>
           <a:ln/>
         </p:spPr>
+        <p:txBody>
+          <a:bodyPr/>
+          <a:p/>
+        </p:txBody>
       </p:sp>
       <p:sp>
         <p:nvSpPr>
@@ -7970,6 +8158,10 @@
           </a:solidFill>
           <a:ln/>
         </p:spPr>
+        <p:txBody>
+          <a:bodyPr/>
+          <a:p/>
+        </p:txBody>
       </p:sp>
       <p:sp>
         <p:nvSpPr>
@@ -8068,6 +8260,10 @@
           </a:solidFill>
           <a:ln/>
         </p:spPr>
+        <p:txBody>
+          <a:bodyPr/>
+          <a:p/>
+        </p:txBody>
       </p:sp>
       <p:sp>
         <p:nvSpPr>
@@ -8166,6 +8362,10 @@
           </a:solidFill>
           <a:ln/>
         </p:spPr>
+        <p:txBody>
+          <a:bodyPr/>
+          <a:p/>
+        </p:txBody>
       </p:sp>
       <p:sp>
         <p:nvSpPr>
@@ -8264,6 +8464,10 @@
           </a:solidFill>
           <a:ln/>
         </p:spPr>
+        <p:txBody>
+          <a:bodyPr/>
+          <a:p/>
+        </p:txBody>
       </p:sp>
       <p:sp>
         <p:nvSpPr>
@@ -8362,6 +8566,10 @@
           </a:solidFill>
           <a:ln/>
         </p:spPr>
+        <p:txBody>
+          <a:bodyPr/>
+          <a:p/>
+        </p:txBody>
       </p:sp>
       <p:sp>
         <p:nvSpPr>
@@ -8531,6 +8739,10 @@
           </a:solidFill>
           <a:ln/>
         </p:spPr>
+        <p:txBody>
+          <a:bodyPr/>
+          <a:p/>
+        </p:txBody>
       </p:sp>
       <p:sp>
         <p:nvSpPr>
@@ -8595,6 +8807,10 @@
             <a:prstDash val="solid"/>
           </a:ln>
         </p:spPr>
+        <p:txBody>
+          <a:bodyPr/>
+          <a:p/>
+        </p:txBody>
       </p:sp>
       <p:sp>
         <p:nvSpPr>
